--- a/10-Knowledge-Products/KP4-DSD/videos/module_3/en/decks/KP4_M3_Deck_v0.1.pptx
+++ b/10-Knowledge-Products/KP4-DSD/videos/module_3/en/decks/KP4_M3_Deck_v0.1.pptx
@@ -1579,7 +1579,7 @@
           <a:p/>
           <a:p>
             <a:r>
-              <a:t>Slide specification: The drawn version, the story with its failures and endings, is figure F8 of the written guide; the slide stays text-only.</a:t>
+              <a:t>Slide specification: Figure F8, its slide variant (figures/slides/F8_story-and-failures.png, drawn by the figure's own program in slide mode): the main steps down the left, each failure beside the step it leaves, an arrow back into the step the story returns to or the ring-and-dot mark where it ends; boxes, arrows and words only, no imagery and no person on screen. The rows are its text equivalent. Calibration item: a drawn figure under ITU's text-only rule.</a:t>
             </a:r>
           </a:p>
         </p:txBody>
@@ -2397,7 +2397,7 @@
           <a:p/>
           <a:p>
             <a:r>
-              <a:t>Slide specification: The drawn version, a screen with the source of every value, is figure F9 of the written guide; the slide stays text-only.</a:t>
+              <a:t>Slide specification: Figure F9, its slide variant (figures/slides/F9_screen-sources.png, drawn by the figure's own program in slide mode): the third screen of the goal with its four values and, beside each, the place it comes from; boxes, arrows and words only, no imagery and no person on screen. The rows are its text equivalent. Calibration item: a drawn figure under ITU's text-only rule.</a:t>
             </a:r>
           </a:p>
         </p:txBody>
@@ -18218,460 +18218,33 @@
           </a:p>
         </p:txBody>
       </p:sp>
-      <p:sp>
-        <p:nvSpPr>
-          <p:cNvPr id="4" name="TextBox 3"/>
-          <p:cNvSpPr txBox="1"/>
-          <p:nvPr/>
-        </p:nvSpPr>
-        <p:spPr>
-          <a:xfrm>
-            <a:off x="658368" y="1463040"/>
-            <a:ext cx="10984687" cy="896112"/>
-          </a:xfrm>
-          <a:prstGeom prst="rect">
-            <a:avLst/>
-          </a:prstGeom>
-          <a:noFill/>
-        </p:spPr>
-        <p:txBody>
-          <a:bodyPr wrap="square">
-            <a:spAutoFit/>
-          </a:bodyPr>
-          <a:lstStyle/>
-          <a:p>
-            <a:pPr>
-              <a:spcAft>
-                <a:spcPts val="300"/>
-              </a:spcAft>
-            </a:pPr>
-            <a:r>
-              <a:rPr sz="1900" b="1" i="0">
-                <a:solidFill>
-                  <a:srgbClr val="1A1A1A"/>
-                </a:solidFill>
-                <a:latin typeface="Arial"/>
-              </a:rPr>
-              <a:t>PNIA does not answer at sign-in</a:t>
-            </a:r>
-          </a:p>
-          <a:p>
-            <a:pPr>
-              <a:spcAft>
-                <a:spcPts val="300"/>
-              </a:spcAft>
-            </a:pPr>
-            <a:r>
-              <a:rPr sz="1550" b="0" i="0">
-                <a:solidFill>
-                  <a:srgbClr val="595959"/>
-                </a:solidFill>
-                <a:latin typeface="Arial"/>
-              </a:rPr>
-              <a:t>says the national sign-in is not available and nothing has started  ·  in failure, nothing recorded.</a:t>
-            </a:r>
-          </a:p>
-        </p:txBody>
-      </p:sp>
-      <p:sp>
-        <p:nvSpPr>
-          <p:cNvPr id="5" name="Rectangle 4"/>
-          <p:cNvSpPr/>
-          <p:nvPr/>
-        </p:nvSpPr>
-        <p:spPr>
-          <a:xfrm>
-            <a:off x="621792" y="2363724"/>
-            <a:ext cx="10881360" cy="12700"/>
-          </a:xfrm>
-          <a:prstGeom prst="rect">
-            <a:avLst/>
-          </a:prstGeom>
-          <a:solidFill>
-            <a:srgbClr val="DDECF4"/>
-          </a:solidFill>
-          <a:ln>
-            <a:noFill/>
-          </a:ln>
-          <a:effectLst/>
-        </p:spPr>
-        <p:style>
-          <a:lnRef idx="1">
-            <a:schemeClr val="accent1"/>
-          </a:lnRef>
-          <a:fillRef idx="3">
-            <a:schemeClr val="accent1"/>
-          </a:fillRef>
-          <a:effectRef idx="2">
-            <a:schemeClr val="accent1"/>
-          </a:effectRef>
-          <a:fontRef idx="minor">
-            <a:schemeClr val="lt1"/>
-          </a:fontRef>
-        </p:style>
-        <p:txBody>
-          <a:bodyPr rtlCol="0" anchor="ctr"/>
-          <a:lstStyle/>
-          <a:p>
-            <a:pPr algn="ctr"/>
-          </a:p>
-        </p:txBody>
-      </p:sp>
-      <p:sp>
-        <p:nvSpPr>
-          <p:cNvPr id="6" name="TextBox 5"/>
-          <p:cNvSpPr txBox="1"/>
-          <p:nvPr/>
-        </p:nvSpPr>
-        <p:spPr>
-          <a:xfrm>
-            <a:off x="658368" y="2404872"/>
-            <a:ext cx="10984687" cy="896112"/>
-          </a:xfrm>
-          <a:prstGeom prst="rect">
-            <a:avLst/>
-          </a:prstGeom>
-          <a:noFill/>
-        </p:spPr>
-        <p:txBody>
-          <a:bodyPr wrap="square">
-            <a:spAutoFit/>
-          </a:bodyPr>
-          <a:lstStyle/>
-          <a:p>
-            <a:pPr>
-              <a:spcAft>
-                <a:spcPts val="300"/>
-              </a:spcAft>
-            </a:pPr>
-            <a:r>
-              <a:rPr sz="1900" b="1" i="0">
-                <a:solidFill>
-                  <a:srgbClr val="1A1A1A"/>
-                </a:solidFill>
-                <a:latin typeface="Arial"/>
-              </a:rPr>
-              <a:t>The evidence of funding is left out</a:t>
-            </a:r>
-          </a:p>
-          <a:p>
-            <a:pPr>
-              <a:spcAft>
-                <a:spcPts val="300"/>
-              </a:spcAft>
-            </a:pPr>
-            <a:r>
-              <a:rPr sz="1550" b="0" i="0">
-                <a:solidFill>
-                  <a:srgbClr val="595959"/>
-                </a:solidFill>
-                <a:latin typeface="Arial"/>
-              </a:rPr>
-              <a:t>names the missing document, keeps the rest  ·  back to step 6.</a:t>
-            </a:r>
-          </a:p>
-        </p:txBody>
-      </p:sp>
-      <p:sp>
-        <p:nvSpPr>
-          <p:cNvPr id="7" name="Rectangle 6"/>
-          <p:cNvSpPr/>
-          <p:nvPr/>
-        </p:nvSpPr>
-        <p:spPr>
-          <a:xfrm>
-            <a:off x="621792" y="3305556"/>
-            <a:ext cx="10881360" cy="12700"/>
-          </a:xfrm>
-          <a:prstGeom prst="rect">
-            <a:avLst/>
-          </a:prstGeom>
-          <a:solidFill>
-            <a:srgbClr val="DDECF4"/>
-          </a:solidFill>
-          <a:ln>
-            <a:noFill/>
-          </a:ln>
-          <a:effectLst/>
-        </p:spPr>
-        <p:style>
-          <a:lnRef idx="1">
-            <a:schemeClr val="accent1"/>
-          </a:lnRef>
-          <a:fillRef idx="3">
-            <a:schemeClr val="accent1"/>
-          </a:fillRef>
-          <a:effectRef idx="2">
-            <a:schemeClr val="accent1"/>
-          </a:effectRef>
-          <a:fontRef idx="minor">
-            <a:schemeClr val="lt1"/>
-          </a:fontRef>
-        </p:style>
-        <p:txBody>
-          <a:bodyPr rtlCol="0" anchor="ctr"/>
-          <a:lstStyle/>
-          <a:p>
-            <a:pPr algn="ctr"/>
-          </a:p>
-        </p:txBody>
-      </p:sp>
-      <p:sp>
-        <p:nvSpPr>
-          <p:cNvPr id="8" name="TextBox 7"/>
-          <p:cNvSpPr txBox="1"/>
-          <p:nvPr/>
-        </p:nvSpPr>
-        <p:spPr>
-          <a:xfrm>
-            <a:off x="658368" y="3346704"/>
-            <a:ext cx="10984687" cy="896112"/>
-          </a:xfrm>
-          <a:prstGeom prst="rect">
-            <a:avLst/>
-          </a:prstGeom>
-          <a:noFill/>
-        </p:spPr>
-        <p:txBody>
-          <a:bodyPr wrap="square">
-            <a:spAutoFit/>
-          </a:bodyPr>
-          <a:lstStyle/>
-          <a:p>
-            <a:pPr>
-              <a:spcAft>
-                <a:spcPts val="300"/>
-              </a:spcAft>
-            </a:pPr>
-            <a:r>
-              <a:rPr sz="1900" b="1" i="0">
-                <a:solidFill>
-                  <a:srgbClr val="1A1A1A"/>
-                </a:solidFill>
-                <a:latin typeface="Arial"/>
-              </a:rPr>
-              <a:t>The proposed name is already held</a:t>
-            </a:r>
-          </a:p>
-          <a:p>
-            <a:pPr>
-              <a:spcAft>
-                <a:spcPts val="300"/>
-              </a:spcAft>
-            </a:pPr>
-            <a:r>
-              <a:rPr sz="1550" b="0" i="0">
-                <a:solidFill>
-                  <a:srgbClr val="595959"/>
-                </a:solidFill>
-                <a:latin typeface="Arial"/>
-              </a:rPr>
-              <a:t>shows the holder's register number, keeps the rest  ·  back to step 6.</a:t>
-            </a:r>
-          </a:p>
-        </p:txBody>
-      </p:sp>
-      <p:sp>
-        <p:nvSpPr>
-          <p:cNvPr id="9" name="Rectangle 8"/>
-          <p:cNvSpPr/>
-          <p:nvPr/>
-        </p:nvSpPr>
-        <p:spPr>
-          <a:xfrm>
-            <a:off x="621792" y="4247388"/>
-            <a:ext cx="10881360" cy="12700"/>
-          </a:xfrm>
-          <a:prstGeom prst="rect">
-            <a:avLst/>
-          </a:prstGeom>
-          <a:solidFill>
-            <a:srgbClr val="DDECF4"/>
-          </a:solidFill>
-          <a:ln>
-            <a:noFill/>
-          </a:ln>
-          <a:effectLst/>
-        </p:spPr>
-        <p:style>
-          <a:lnRef idx="1">
-            <a:schemeClr val="accent1"/>
-          </a:lnRef>
-          <a:fillRef idx="3">
-            <a:schemeClr val="accent1"/>
-          </a:fillRef>
-          <a:effectRef idx="2">
-            <a:schemeClr val="accent1"/>
-          </a:effectRef>
-          <a:fontRef idx="minor">
-            <a:schemeClr val="lt1"/>
-          </a:fontRef>
-        </p:style>
-        <p:txBody>
-          <a:bodyPr rtlCol="0" anchor="ctr"/>
-          <a:lstStyle/>
-          <a:p>
-            <a:pPr algn="ctr"/>
-          </a:p>
-        </p:txBody>
-      </p:sp>
-      <p:sp>
-        <p:nvSpPr>
-          <p:cNvPr id="10" name="TextBox 9"/>
-          <p:cNvSpPr txBox="1"/>
-          <p:nvPr/>
-        </p:nvSpPr>
-        <p:spPr>
-          <a:xfrm>
-            <a:off x="658368" y="4288536"/>
-            <a:ext cx="10984687" cy="896112"/>
-          </a:xfrm>
-          <a:prstGeom prst="rect">
-            <a:avLst/>
-          </a:prstGeom>
-          <a:noFill/>
-        </p:spPr>
-        <p:txBody>
-          <a:bodyPr wrap="square">
-            <a:spAutoFit/>
-          </a:bodyPr>
-          <a:lstStyle/>
-          <a:p>
-            <a:pPr>
-              <a:spcAft>
-                <a:spcPts val="300"/>
-              </a:spcAft>
-            </a:pPr>
-            <a:r>
-              <a:rPr sz="1900" b="1" i="0">
-                <a:solidFill>
-                  <a:srgbClr val="1A1A1A"/>
-                </a:solidFill>
-                <a:latin typeface="Arial"/>
-              </a:rPr>
-              <a:t>The fee is not confirmed</a:t>
-            </a:r>
-          </a:p>
-          <a:p>
-            <a:pPr>
-              <a:spcAft>
-                <a:spcPts val="300"/>
-              </a:spcAft>
-            </a:pPr>
-            <a:r>
-              <a:rPr sz="1550" b="0" i="0">
-                <a:solidFill>
-                  <a:srgbClr val="595959"/>
-                </a:solidFill>
-                <a:latin typeface="Arial"/>
-              </a:rPr>
-              <a:t>says the application has not been made  ·  back to step 8, or in failure.</a:t>
-            </a:r>
-          </a:p>
-        </p:txBody>
-      </p:sp>
-      <p:sp>
-        <p:nvSpPr>
-          <p:cNvPr id="11" name="Rectangle 10"/>
-          <p:cNvSpPr/>
-          <p:nvPr/>
-        </p:nvSpPr>
-        <p:spPr>
-          <a:xfrm>
-            <a:off x="621792" y="5189220"/>
-            <a:ext cx="10881360" cy="12700"/>
-          </a:xfrm>
-          <a:prstGeom prst="rect">
-            <a:avLst/>
-          </a:prstGeom>
-          <a:solidFill>
-            <a:srgbClr val="DDECF4"/>
-          </a:solidFill>
-          <a:ln>
-            <a:noFill/>
-          </a:ln>
-          <a:effectLst/>
-        </p:spPr>
-        <p:style>
-          <a:lnRef idx="1">
-            <a:schemeClr val="accent1"/>
-          </a:lnRef>
-          <a:fillRef idx="3">
-            <a:schemeClr val="accent1"/>
-          </a:fillRef>
-          <a:effectRef idx="2">
-            <a:schemeClr val="accent1"/>
-          </a:effectRef>
-          <a:fontRef idx="minor">
-            <a:schemeClr val="lt1"/>
-          </a:fontRef>
-        </p:style>
-        <p:txBody>
-          <a:bodyPr rtlCol="0" anchor="ctr"/>
-          <a:lstStyle/>
-          <a:p>
-            <a:pPr algn="ctr"/>
-          </a:p>
-        </p:txBody>
-      </p:sp>
-      <p:sp>
-        <p:nvSpPr>
-          <p:cNvPr id="12" name="TextBox 11"/>
-          <p:cNvSpPr txBox="1"/>
-          <p:nvPr/>
-        </p:nvSpPr>
-        <p:spPr>
-          <a:xfrm>
-            <a:off x="658368" y="5230368"/>
-            <a:ext cx="10984687" cy="896112"/>
-          </a:xfrm>
-          <a:prstGeom prst="rect">
-            <a:avLst/>
-          </a:prstGeom>
-          <a:noFill/>
-        </p:spPr>
-        <p:txBody>
-          <a:bodyPr wrap="square">
-            <a:spAutoFit/>
-          </a:bodyPr>
-          <a:lstStyle/>
-          <a:p>
-            <a:pPr>
-              <a:spcAft>
-                <a:spcPts val="300"/>
-              </a:spcAft>
-            </a:pPr>
-            <a:r>
-              <a:rPr sz="1900" b="1" i="0">
-                <a:solidFill>
-                  <a:srgbClr val="1A1A1A"/>
-                </a:solidFill>
-                <a:latin typeface="Arial"/>
-              </a:rPr>
-              <a:t>The applicant leaves and returns two days later</a:t>
-            </a:r>
-          </a:p>
-          <a:p>
-            <a:pPr>
-              <a:spcAft>
-                <a:spcPts val="300"/>
-              </a:spcAft>
-            </a:pPr>
-            <a:r>
-              <a:rPr sz="1550" b="0" i="0">
-                <a:solidFill>
-                  <a:srgbClr val="595959"/>
-                </a:solidFill>
-                <a:latin typeface="Arial"/>
-              </a:rPr>
-              <a:t>nothing is kept  ·  in failure.</a:t>
-            </a:r>
-          </a:p>
-        </p:txBody>
-      </p:sp>
-      <p:sp>
-        <p:nvSpPr>
-          <p:cNvPr id="13" name="TextBox 12"/>
+      <p:pic>
+        <p:nvPicPr>
+          <p:cNvPr id="4" name="kp4-figure F8" descr="F8_story-and-failures.png"/>
+          <p:cNvPicPr>
+            <a:picLocks noChangeAspect="1"/>
+          </p:cNvPicPr>
+          <p:nvPr/>
+        </p:nvPicPr>
+        <p:blipFill>
+          <a:blip r:embed="rId2"/>
+          <a:stretch>
+            <a:fillRect/>
+          </a:stretch>
+        </p:blipFill>
+        <p:spPr>
+          <a:xfrm>
+            <a:off x="1008169" y="1280160"/>
+            <a:ext cx="10181757" cy="5074920"/>
+          </a:xfrm>
+          <a:prstGeom prst="rect">
+            <a:avLst/>
+          </a:prstGeom>
+        </p:spPr>
+      </p:pic>
+      <p:sp>
+        <p:nvSpPr>
+          <p:cNvPr id="5" name="TextBox 4"/>
           <p:cNvSpPr txBox="1"/>
           <p:nvPr/>
         </p:nvSpPr>
@@ -21864,361 +21437,33 @@
           </a:p>
         </p:txBody>
       </p:sp>
-      <p:sp>
-        <p:nvSpPr>
-          <p:cNvPr id="4" name="TextBox 3"/>
-          <p:cNvSpPr txBox="1"/>
-          <p:nvPr/>
-        </p:nvSpPr>
-        <p:spPr>
-          <a:xfrm>
-            <a:off x="658368" y="1463040"/>
-            <a:ext cx="10984687" cy="1131570"/>
-          </a:xfrm>
-          <a:prstGeom prst="rect">
-            <a:avLst/>
-          </a:prstGeom>
-          <a:noFill/>
-        </p:spPr>
-        <p:txBody>
-          <a:bodyPr wrap="square">
-            <a:spAutoFit/>
-          </a:bodyPr>
-          <a:lstStyle/>
-          <a:p>
-            <a:pPr>
-              <a:spcAft>
-                <a:spcPts val="300"/>
-              </a:spcAft>
-            </a:pPr>
-            <a:r>
-              <a:rPr sz="1900" b="1" i="0">
-                <a:solidFill>
-                  <a:srgbClr val="1A1A1A"/>
-                </a:solidFill>
-                <a:latin typeface="Arial"/>
-              </a:rPr>
-              <a:t>The applicant's name</a:t>
-            </a:r>
-          </a:p>
-          <a:p>
-            <a:pPr>
-              <a:spcAft>
-                <a:spcPts val="300"/>
-              </a:spcAft>
-            </a:pPr>
-            <a:r>
-              <a:rPr sz="1550" b="0" i="0">
-                <a:solidFill>
-                  <a:srgbClr val="595959"/>
-                </a:solidFill>
-                <a:latin typeface="Arial"/>
-              </a:rPr>
-              <a:t>taken from PNIA's sign-in.</a:t>
-            </a:r>
-          </a:p>
-        </p:txBody>
-      </p:sp>
-      <p:sp>
-        <p:nvSpPr>
-          <p:cNvPr id="5" name="Rectangle 4"/>
-          <p:cNvSpPr/>
-          <p:nvPr/>
-        </p:nvSpPr>
-        <p:spPr>
-          <a:xfrm>
-            <a:off x="621792" y="2599182"/>
-            <a:ext cx="10881360" cy="12700"/>
-          </a:xfrm>
-          <a:prstGeom prst="rect">
-            <a:avLst/>
-          </a:prstGeom>
-          <a:solidFill>
-            <a:srgbClr val="DDECF4"/>
-          </a:solidFill>
-          <a:ln>
-            <a:noFill/>
-          </a:ln>
-          <a:effectLst/>
-        </p:spPr>
-        <p:style>
-          <a:lnRef idx="1">
-            <a:schemeClr val="accent1"/>
-          </a:lnRef>
-          <a:fillRef idx="3">
-            <a:schemeClr val="accent1"/>
-          </a:fillRef>
-          <a:effectRef idx="2">
-            <a:schemeClr val="accent1"/>
-          </a:effectRef>
-          <a:fontRef idx="minor">
-            <a:schemeClr val="lt1"/>
-          </a:fontRef>
-        </p:style>
-        <p:txBody>
-          <a:bodyPr rtlCol="0" anchor="ctr"/>
-          <a:lstStyle/>
-          <a:p>
-            <a:pPr algn="ctr"/>
-          </a:p>
-        </p:txBody>
-      </p:sp>
-      <p:sp>
-        <p:nvSpPr>
-          <p:cNvPr id="6" name="TextBox 5"/>
-          <p:cNvSpPr txBox="1"/>
-          <p:nvPr/>
-        </p:nvSpPr>
-        <p:spPr>
-          <a:xfrm>
-            <a:off x="658368" y="2640330"/>
-            <a:ext cx="10984687" cy="1131570"/>
-          </a:xfrm>
-          <a:prstGeom prst="rect">
-            <a:avLst/>
-          </a:prstGeom>
-          <a:noFill/>
-        </p:spPr>
-        <p:txBody>
-          <a:bodyPr wrap="square">
-            <a:spAutoFit/>
-          </a:bodyPr>
-          <a:lstStyle/>
-          <a:p>
-            <a:pPr>
-              <a:spcAft>
-                <a:spcPts val="300"/>
-              </a:spcAft>
-            </a:pPr>
-            <a:r>
-              <a:rPr sz="1900" b="1" i="0">
-                <a:solidFill>
-                  <a:srgbClr val="1A1A1A"/>
-                </a:solidFill>
-                <a:latin typeface="Arial"/>
-              </a:rPr>
-              <a:t>The kind of institution</a:t>
-            </a:r>
-          </a:p>
-          <a:p>
-            <a:pPr>
-              <a:spcAft>
-                <a:spcPts val="300"/>
-              </a:spcAft>
-            </a:pPr>
-            <a:r>
-              <a:rPr sz="1550" b="0" i="0">
-                <a:solidFill>
-                  <a:srgbClr val="595959"/>
-                </a:solidFill>
-                <a:latin typeface="Arial"/>
-              </a:rPr>
-              <a:t>chosen from PHEQA's shared list: university, university college, technical institute.</a:t>
-            </a:r>
-          </a:p>
-        </p:txBody>
-      </p:sp>
-      <p:sp>
-        <p:nvSpPr>
-          <p:cNvPr id="7" name="Rectangle 6"/>
-          <p:cNvSpPr/>
-          <p:nvPr/>
-        </p:nvSpPr>
-        <p:spPr>
-          <a:xfrm>
-            <a:off x="621792" y="3776472"/>
-            <a:ext cx="10881360" cy="12700"/>
-          </a:xfrm>
-          <a:prstGeom prst="rect">
-            <a:avLst/>
-          </a:prstGeom>
-          <a:solidFill>
-            <a:srgbClr val="DDECF4"/>
-          </a:solidFill>
-          <a:ln>
-            <a:noFill/>
-          </a:ln>
-          <a:effectLst/>
-        </p:spPr>
-        <p:style>
-          <a:lnRef idx="1">
-            <a:schemeClr val="accent1"/>
-          </a:lnRef>
-          <a:fillRef idx="3">
-            <a:schemeClr val="accent1"/>
-          </a:fillRef>
-          <a:effectRef idx="2">
-            <a:schemeClr val="accent1"/>
-          </a:effectRef>
-          <a:fontRef idx="minor">
-            <a:schemeClr val="lt1"/>
-          </a:fontRef>
-        </p:style>
-        <p:txBody>
-          <a:bodyPr rtlCol="0" anchor="ctr"/>
-          <a:lstStyle/>
-          <a:p>
-            <a:pPr algn="ctr"/>
-          </a:p>
-        </p:txBody>
-      </p:sp>
-      <p:sp>
-        <p:nvSpPr>
-          <p:cNvPr id="8" name="TextBox 7"/>
-          <p:cNvSpPr txBox="1"/>
-          <p:nvPr/>
-        </p:nvSpPr>
-        <p:spPr>
-          <a:xfrm>
-            <a:off x="658368" y="3817620"/>
-            <a:ext cx="10984687" cy="1131570"/>
-          </a:xfrm>
-          <a:prstGeom prst="rect">
-            <a:avLst/>
-          </a:prstGeom>
-          <a:noFill/>
-        </p:spPr>
-        <p:txBody>
-          <a:bodyPr wrap="square">
-            <a:spAutoFit/>
-          </a:bodyPr>
-          <a:lstStyle/>
-          <a:p>
-            <a:pPr>
-              <a:spcAft>
-                <a:spcPts val="300"/>
-              </a:spcAft>
-            </a:pPr>
-            <a:r>
-              <a:rPr sz="1900" b="1" i="0">
-                <a:solidFill>
-                  <a:srgbClr val="1A1A1A"/>
-                </a:solidFill>
-                <a:latin typeface="Arial"/>
-              </a:rPr>
-              <a:t>The fee due</a:t>
-            </a:r>
-          </a:p>
-          <a:p>
-            <a:pPr>
-              <a:spcAft>
-                <a:spcPts val="300"/>
-              </a:spcAft>
-            </a:pPr>
-            <a:r>
-              <a:rPr sz="1550" b="0" i="0">
-                <a:solidFill>
-                  <a:srgbClr val="595959"/>
-                </a:solidFill>
-                <a:latin typeface="Arial"/>
-              </a:rPr>
-              <a:t>read from the setting PHEQA's finance officer owns.</a:t>
-            </a:r>
-          </a:p>
-        </p:txBody>
-      </p:sp>
-      <p:sp>
-        <p:nvSpPr>
-          <p:cNvPr id="9" name="Rectangle 8"/>
-          <p:cNvSpPr/>
-          <p:nvPr/>
-        </p:nvSpPr>
-        <p:spPr>
-          <a:xfrm>
-            <a:off x="621792" y="4953762"/>
-            <a:ext cx="10881360" cy="12700"/>
-          </a:xfrm>
-          <a:prstGeom prst="rect">
-            <a:avLst/>
-          </a:prstGeom>
-          <a:solidFill>
-            <a:srgbClr val="DDECF4"/>
-          </a:solidFill>
-          <a:ln>
-            <a:noFill/>
-          </a:ln>
-          <a:effectLst/>
-        </p:spPr>
-        <p:style>
-          <a:lnRef idx="1">
-            <a:schemeClr val="accent1"/>
-          </a:lnRef>
-          <a:fillRef idx="3">
-            <a:schemeClr val="accent1"/>
-          </a:fillRef>
-          <a:effectRef idx="2">
-            <a:schemeClr val="accent1"/>
-          </a:effectRef>
-          <a:fontRef idx="minor">
-            <a:schemeClr val="lt1"/>
-          </a:fontRef>
-        </p:style>
-        <p:txBody>
-          <a:bodyPr rtlCol="0" anchor="ctr"/>
-          <a:lstStyle/>
-          <a:p>
-            <a:pPr algn="ctr"/>
-          </a:p>
-        </p:txBody>
-      </p:sp>
-      <p:sp>
-        <p:nvSpPr>
-          <p:cNvPr id="10" name="TextBox 9"/>
-          <p:cNvSpPr txBox="1"/>
-          <p:nvPr/>
-        </p:nvSpPr>
-        <p:spPr>
-          <a:xfrm>
-            <a:off x="658368" y="4994910"/>
-            <a:ext cx="10984687" cy="1131570"/>
-          </a:xfrm>
-          <a:prstGeom prst="rect">
-            <a:avLst/>
-          </a:prstGeom>
-          <a:noFill/>
-        </p:spPr>
-        <p:txBody>
-          <a:bodyPr wrap="square">
-            <a:spAutoFit/>
-          </a:bodyPr>
-          <a:lstStyle/>
-          <a:p>
-            <a:pPr>
-              <a:spcAft>
-                <a:spcPts val="300"/>
-              </a:spcAft>
-            </a:pPr>
-            <a:r>
-              <a:rPr sz="1900" b="1" i="0">
-                <a:solidFill>
-                  <a:srgbClr val="1A1A1A"/>
-                </a:solidFill>
-                <a:latin typeface="Arial"/>
-              </a:rPr>
-              <a:t>The proposed name</a:t>
-            </a:r>
-          </a:p>
-          <a:p>
-            <a:pPr>
-              <a:spcAft>
-                <a:spcPts val="300"/>
-              </a:spcAft>
-            </a:pPr>
-            <a:r>
-              <a:rPr sz="1550" b="0" i="0">
-                <a:solidFill>
-                  <a:srgbClr val="595959"/>
-                </a:solidFill>
-                <a:latin typeface="Arial"/>
-              </a:rPr>
-              <a:t>entered here, then checked against the register of institutions.</a:t>
-            </a:r>
-          </a:p>
-        </p:txBody>
-      </p:sp>
-      <p:sp>
-        <p:nvSpPr>
-          <p:cNvPr id="11" name="TextBox 10"/>
+      <p:pic>
+        <p:nvPicPr>
+          <p:cNvPr id="4" name="kp4-figure F9" descr="F9_screen-sources.png"/>
+          <p:cNvPicPr>
+            <a:picLocks noChangeAspect="1"/>
+          </p:cNvPicPr>
+          <p:nvPr/>
+        </p:nvPicPr>
+        <p:blipFill>
+          <a:blip r:embed="rId2"/>
+          <a:stretch>
+            <a:fillRect/>
+          </a:stretch>
+        </p:blipFill>
+        <p:spPr>
+          <a:xfrm>
+            <a:off x="2447405" y="1280160"/>
+            <a:ext cx="7303284" cy="5074920"/>
+          </a:xfrm>
+          <a:prstGeom prst="rect">
+            <a:avLst/>
+          </a:prstGeom>
+        </p:spPr>
+      </p:pic>
+      <p:sp>
+        <p:nvSpPr>
+          <p:cNvPr id="5" name="TextBox 4"/>
           <p:cNvSpPr txBox="1"/>
           <p:nvPr/>
         </p:nvSpPr>
